--- a/artifacts/ppt/zoho_slides.pptx
+++ b/artifacts/ppt/zoho_slides.pptx
@@ -3106,6 +3106,11 @@
           <a:lstStyle/>
           <a:p>
             <a:r>
+              <a:rPr>
+                <a:solidFill>
+                  <a:srgbClr val="1E293B"/>
+                </a:solidFill>
+              </a:rPr>
               <a:t>Zoho Corporation Partnership Brief</a:t>
             </a:r>
           </a:p>
@@ -3127,6 +3132,11 @@
           <a:lstStyle/>
           <a:p>
             <a:r>
+              <a:rPr>
+                <a:solidFill>
+                  <a:srgbClr val="334155"/>
+                </a:solidFill>
+              </a:rPr>
               <a:t>Business Intelligence Brief | Powered by AI Agent Framework</a:t>
             </a:r>
           </a:p>
@@ -3166,6 +3176,11 @@
           <a:lstStyle/>
           <a:p>
             <a:r>
+              <a:rPr>
+                <a:solidFill>
+                  <a:srgbClr val="1E293B"/>
+                </a:solidFill>
+              </a:rPr>
               <a:t>Strategic Analysis: Zoho Corporation</a:t>
             </a:r>
           </a:p>
@@ -3187,18 +3202,33 @@
           <a:lstStyle/>
           <a:p>
             <a:r>
+              <a:rPr>
+                <a:solidFill>
+                  <a:srgbClr val="334155"/>
+                </a:solidFill>
+              </a:rPr>
               <a:t>Headquarters: Chennai, India &amp; Austin, Texas</a:t>
             </a:r>
           </a:p>
           <a:p>
             <a:pPr/>
             <a:r>
+              <a:rPr>
+                <a:solidFill>
+                  <a:srgbClr val="334155"/>
+                </a:solidFill>
+              </a:rPr>
               <a:t>Operational size: 10,000+ employees</a:t>
             </a:r>
           </a:p>
           <a:p>
             <a:pPr/>
             <a:r>
+              <a:rPr>
+                <a:solidFill>
+                  <a:srgbClr val="334155"/>
+                </a:solidFill>
+              </a:rPr>
               <a:t>Target Segment: Software / SaaS</a:t>
             </a:r>
           </a:p>
@@ -3238,6 +3268,11 @@
           <a:lstStyle/>
           <a:p>
             <a:r>
+              <a:rPr>
+                <a:solidFill>
+                  <a:srgbClr val="1E293B"/>
+                </a:solidFill>
+              </a:rPr>
               <a:t>Actionable News Signals</a:t>
             </a:r>
           </a:p>
@@ -3259,18 +3294,33 @@
           <a:lstStyle/>
           <a:p>
             <a:r>
+              <a:rPr>
+                <a:solidFill>
+                  <a:srgbClr val="334155"/>
+                </a:solidFill>
+              </a:rPr>
               <a:t>Signal: Zoho launches new AI-driven CRM tools</a:t>
             </a:r>
           </a:p>
           <a:p>
             <a:pPr/>
             <a:r>
+              <a:rPr>
+                <a:solidFill>
+                  <a:srgbClr val="334155"/>
+                </a:solidFill>
+              </a:rPr>
               <a:t>Opportunity to deploy automated workspace agents</a:t>
             </a:r>
           </a:p>
           <a:p>
             <a:pPr/>
             <a:r>
+              <a:rPr>
+                <a:solidFill>
+                  <a:srgbClr val="334155"/>
+                </a:solidFill>
+              </a:rPr>
               <a:t>Reduces time-to-market for slide and report compilation by 90%.</a:t>
             </a:r>
           </a:p>
